--- a/ch02_microbiome_data/figures/overview_aggregation.pptx
+++ b/ch02_microbiome_data/figures/overview_aggregation.pptx
@@ -371,7 +371,7 @@
           <a:p>
             <a:fld id="{C764DE79-268F-4C1A-8933-263129D2AF90}" type="datetimeFigureOut">
               <a:rPr lang="en-US" smtClean="0"/>
-              <a:t>6/16/2026</a:t>
+              <a:t>7/4/2026</a:t>
             </a:fld>
             <a:endParaRPr lang="en-US" dirty="0"/>
           </a:p>
@@ -542,7 +542,7 @@
           <a:p>
             <a:fld id="{C764DE79-268F-4C1A-8933-263129D2AF90}" type="datetimeFigureOut">
               <a:rPr lang="en-US" smtClean="0"/>
-              <a:t>6/16/2026</a:t>
+              <a:t>7/4/2026</a:t>
             </a:fld>
             <a:endParaRPr lang="en-US" dirty="0"/>
           </a:p>
@@ -723,7 +723,7 @@
           <a:p>
             <a:fld id="{C764DE79-268F-4C1A-8933-263129D2AF90}" type="datetimeFigureOut">
               <a:rPr lang="en-US" smtClean="0"/>
-              <a:t>6/16/2026</a:t>
+              <a:t>7/4/2026</a:t>
             </a:fld>
             <a:endParaRPr lang="en-US" dirty="0"/>
           </a:p>
@@ -929,7 +929,7 @@
           <a:p>
             <a:fld id="{C764DE79-268F-4C1A-8933-263129D2AF90}" type="datetimeFigureOut">
               <a:rPr lang="en-US" smtClean="0"/>
-              <a:t>6/16/2026</a:t>
+              <a:t>7/4/2026</a:t>
             </a:fld>
             <a:endParaRPr lang="en-US" dirty="0"/>
           </a:p>
@@ -1176,7 +1176,7 @@
           <a:p>
             <a:fld id="{C764DE79-268F-4C1A-8933-263129D2AF90}" type="datetimeFigureOut">
               <a:rPr lang="en-US" smtClean="0"/>
-              <a:t>6/16/2026</a:t>
+              <a:t>7/4/2026</a:t>
             </a:fld>
             <a:endParaRPr lang="en-US" dirty="0"/>
           </a:p>
@@ -1409,7 +1409,7 @@
           <a:p>
             <a:fld id="{C764DE79-268F-4C1A-8933-263129D2AF90}" type="datetimeFigureOut">
               <a:rPr lang="en-US" smtClean="0"/>
-              <a:t>6/16/2026</a:t>
+              <a:t>7/4/2026</a:t>
             </a:fld>
             <a:endParaRPr lang="en-US" dirty="0"/>
           </a:p>
@@ -1777,7 +1777,7 @@
           <a:p>
             <a:fld id="{C764DE79-268F-4C1A-8933-263129D2AF90}" type="datetimeFigureOut">
               <a:rPr lang="en-US" smtClean="0"/>
-              <a:t>6/16/2026</a:t>
+              <a:t>7/4/2026</a:t>
             </a:fld>
             <a:endParaRPr lang="en-US" dirty="0"/>
           </a:p>
@@ -1896,7 +1896,7 @@
           <a:p>
             <a:fld id="{C764DE79-268F-4C1A-8933-263129D2AF90}" type="datetimeFigureOut">
               <a:rPr lang="en-US" smtClean="0"/>
-              <a:t>6/16/2026</a:t>
+              <a:t>7/4/2026</a:t>
             </a:fld>
             <a:endParaRPr lang="en-US" dirty="0"/>
           </a:p>
@@ -1992,7 +1992,7 @@
           <a:p>
             <a:fld id="{C764DE79-268F-4C1A-8933-263129D2AF90}" type="datetimeFigureOut">
               <a:rPr lang="en-US" smtClean="0"/>
-              <a:t>6/16/2026</a:t>
+              <a:t>7/4/2026</a:t>
             </a:fld>
             <a:endParaRPr lang="en-US" dirty="0"/>
           </a:p>
@@ -2270,7 +2270,7 @@
           <a:p>
             <a:fld id="{C764DE79-268F-4C1A-8933-263129D2AF90}" type="datetimeFigureOut">
               <a:rPr lang="en-US" smtClean="0"/>
-              <a:t>6/16/2026</a:t>
+              <a:t>7/4/2026</a:t>
             </a:fld>
             <a:endParaRPr lang="en-US" dirty="0"/>
           </a:p>
@@ -2528,7 +2528,7 @@
           <a:p>
             <a:fld id="{C764DE79-268F-4C1A-8933-263129D2AF90}" type="datetimeFigureOut">
               <a:rPr lang="en-US" smtClean="0"/>
-              <a:t>6/16/2026</a:t>
+              <a:t>7/4/2026</a:t>
             </a:fld>
             <a:endParaRPr lang="en-US" dirty="0"/>
           </a:p>
@@ -2742,7 +2742,7 @@
           <a:p>
             <a:fld id="{C764DE79-268F-4C1A-8933-263129D2AF90}" type="datetimeFigureOut">
               <a:rPr lang="en-US" smtClean="0"/>
-              <a:t>6/16/2026</a:t>
+              <a:t>7/4/2026</a:t>
             </a:fld>
             <a:endParaRPr lang="en-US" dirty="0"/>
           </a:p>
@@ -3155,8 +3155,8 @@
           <a:chExt cx="0" cy="0"/>
         </a:xfrm>
       </p:grpSpPr>
-      <mc:AlternateContent xmlns:mc="http://schemas.openxmlformats.org/markup-compatibility/2006" xmlns:a14="http://schemas.microsoft.com/office/drawing/2010/main">
-        <mc:Choice Requires="a14">
+      <mc:AlternateContent xmlns:mc="http://schemas.openxmlformats.org/markup-compatibility/2006">
+        <mc:Choice xmlns:a14="http://schemas.microsoft.com/office/drawing/2010/main" Requires="a14">
           <p:graphicFrame>
             <p:nvGraphicFramePr>
               <p:cNvPr id="563" name="Tabelle 562">
@@ -3172,7 +3172,7 @@
               <p:nvPr>
                 <p:extLst>
                   <p:ext uri="{D42A27DB-BD31-4B8C-83A1-F6EECF244321}">
-                    <p14:modId xmlns:p14="http://schemas.microsoft.com/office/powerpoint/2010/main" val="3899420533"/>
+                    <p14:modId xmlns:p14="http://schemas.microsoft.com/office/powerpoint/2010/main" val="3448409221"/>
                   </p:ext>
                 </p:extLst>
               </p:nvPr>
@@ -3536,7 +3536,7 @@
                           <a:tailEnd type="none" w="med" len="med"/>
                         </a:lnB>
                         <a:solidFill>
-                          <a:srgbClr val="FAFAFA"/>
+                          <a:srgbClr val="E2F1FE"/>
                         </a:solidFill>
                       </a:tcPr>
                     </a:tc>
@@ -3590,7 +3590,7 @@
                           <a:tailEnd type="none" w="med" len="med"/>
                         </a:lnB>
                         <a:solidFill>
-                          <a:srgbClr val="FAFAFA"/>
+                          <a:srgbClr val="FCEBE0"/>
                         </a:solidFill>
                       </a:tcPr>
                     </a:tc>
@@ -3644,7 +3644,7 @@
                           <a:tailEnd type="none" w="med" len="med"/>
                         </a:lnB>
                         <a:solidFill>
-                          <a:srgbClr val="FAFAFA"/>
+                          <a:srgbClr val="F2FAF2"/>
                         </a:solidFill>
                       </a:tcPr>
                     </a:tc>
@@ -5010,7 +5010,7 @@
             </a:graphic>
           </p:graphicFrame>
         </mc:Choice>
-        <mc:Fallback xmlns="">
+        <mc:Fallback>
           <p:graphicFrame>
             <p:nvGraphicFramePr>
               <p:cNvPr id="563" name="Tabelle 562">
@@ -5026,7 +5026,7 @@
               <p:nvPr>
                 <p:extLst>
                   <p:ext uri="{D42A27DB-BD31-4B8C-83A1-F6EECF244321}">
-                    <p14:modId xmlns:p14="http://schemas.microsoft.com/office/powerpoint/2010/main" val="3899420533"/>
+                    <p14:modId xmlns:p14="http://schemas.microsoft.com/office/powerpoint/2010/main" val="3448409221"/>
                   </p:ext>
                 </p:extLst>
               </p:nvPr>
@@ -5379,7 +5379,7 @@
                           <a:tailEnd type="none" w="med" len="med"/>
                         </a:lnB>
                         <a:solidFill>
-                          <a:srgbClr val="FAFAFA"/>
+                          <a:srgbClr val="E2F1FE"/>
                         </a:solidFill>
                       </a:tcPr>
                     </a:tc>
@@ -5433,7 +5433,7 @@
                           <a:tailEnd type="none" w="med" len="med"/>
                         </a:lnB>
                         <a:solidFill>
-                          <a:srgbClr val="FAFAFA"/>
+                          <a:srgbClr val="FCEBE0"/>
                         </a:solidFill>
                       </a:tcPr>
                     </a:tc>
@@ -5487,7 +5487,7 @@
                           <a:tailEnd type="none" w="med" len="med"/>
                         </a:lnB>
                         <a:solidFill>
-                          <a:srgbClr val="FAFAFA"/>
+                          <a:srgbClr val="F2FAF2"/>
                         </a:solidFill>
                       </a:tcPr>
                     </a:tc>
@@ -7917,8 +7917,8 @@
           </a:graphicData>
         </a:graphic>
       </p:graphicFrame>
-      <mc:AlternateContent xmlns:mc="http://schemas.openxmlformats.org/markup-compatibility/2006" xmlns:a14="http://schemas.microsoft.com/office/drawing/2010/main">
-        <mc:Choice Requires="a14">
+      <mc:AlternateContent xmlns:mc="http://schemas.openxmlformats.org/markup-compatibility/2006">
+        <mc:Choice xmlns:a14="http://schemas.microsoft.com/office/drawing/2010/main" Requires="a14">
           <p:graphicFrame>
             <p:nvGraphicFramePr>
               <p:cNvPr id="571" name="Tabelle 570">
@@ -7934,7 +7934,7 @@
               <p:nvPr>
                 <p:extLst>
                   <p:ext uri="{D42A27DB-BD31-4B8C-83A1-F6EECF244321}">
-                    <p14:modId xmlns:p14="http://schemas.microsoft.com/office/powerpoint/2010/main" val="2424913302"/>
+                    <p14:modId xmlns:p14="http://schemas.microsoft.com/office/powerpoint/2010/main" val="2306578975"/>
                   </p:ext>
                 </p:extLst>
               </p:nvPr>
@@ -8699,7 +8699,7 @@
                           <a:tailEnd type="none" w="med" len="med"/>
                         </a:lnB>
                         <a:solidFill>
-                          <a:srgbClr val="FAFAFA"/>
+                          <a:srgbClr val="E2F1FE"/>
                         </a:solidFill>
                       </a:tcPr>
                     </a:tc>
@@ -8753,7 +8753,7 @@
                           <a:tailEnd type="none" w="med" len="med"/>
                         </a:lnB>
                         <a:solidFill>
-                          <a:srgbClr val="FAFAFA"/>
+                          <a:srgbClr val="E2F1FE"/>
                         </a:solidFill>
                       </a:tcPr>
                     </a:tc>
@@ -8807,7 +8807,7 @@
                           <a:tailEnd type="none" w="med" len="med"/>
                         </a:lnB>
                         <a:solidFill>
-                          <a:srgbClr val="FAFAFA"/>
+                          <a:srgbClr val="E2F1FE"/>
                         </a:solidFill>
                       </a:tcPr>
                     </a:tc>
@@ -8861,7 +8861,7 @@
                           <a:tailEnd type="none" w="med" len="med"/>
                         </a:lnB>
                         <a:solidFill>
-                          <a:srgbClr val="FAFAFA"/>
+                          <a:srgbClr val="FCEBE0"/>
                         </a:solidFill>
                       </a:tcPr>
                     </a:tc>
@@ -8915,7 +8915,7 @@
                           <a:tailEnd type="none" w="med" len="med"/>
                         </a:lnB>
                         <a:solidFill>
-                          <a:srgbClr val="FAFAFA"/>
+                          <a:srgbClr val="FCEBE0"/>
                         </a:solidFill>
                       </a:tcPr>
                     </a:tc>
@@ -8969,7 +8969,7 @@
                           <a:tailEnd type="none" w="med" len="med"/>
                         </a:lnB>
                         <a:solidFill>
-                          <a:srgbClr val="FAFAFA"/>
+                          <a:srgbClr val="F2FAF2"/>
                         </a:solidFill>
                       </a:tcPr>
                     </a:tc>
@@ -9023,7 +9023,7 @@
                           <a:tailEnd type="none" w="med" len="med"/>
                         </a:lnB>
                         <a:solidFill>
-                          <a:srgbClr val="FAFAFA"/>
+                          <a:srgbClr val="F2FAF2"/>
                         </a:solidFill>
                       </a:tcPr>
                     </a:tc>
@@ -9077,7 +9077,7 @@
                           <a:tailEnd type="none" w="med" len="med"/>
                         </a:lnB>
                         <a:solidFill>
-                          <a:srgbClr val="FAFAFA"/>
+                          <a:srgbClr val="F2FAF2"/>
                         </a:solidFill>
                       </a:tcPr>
                     </a:tc>
@@ -12121,7 +12121,7 @@
             </a:graphic>
           </p:graphicFrame>
         </mc:Choice>
-        <mc:Fallback xmlns="">
+        <mc:Fallback>
           <p:graphicFrame>
             <p:nvGraphicFramePr>
               <p:cNvPr id="571" name="Tabelle 570">
@@ -12137,7 +12137,7 @@
               <p:nvPr>
                 <p:extLst>
                   <p:ext uri="{D42A27DB-BD31-4B8C-83A1-F6EECF244321}">
-                    <p14:modId xmlns:p14="http://schemas.microsoft.com/office/powerpoint/2010/main" val="2424913302"/>
+                    <p14:modId xmlns:p14="http://schemas.microsoft.com/office/powerpoint/2010/main" val="2306578975"/>
                   </p:ext>
                 </p:extLst>
               </p:nvPr>
@@ -12803,7 +12803,7 @@
                           <a:tailEnd type="none" w="med" len="med"/>
                         </a:lnB>
                         <a:solidFill>
-                          <a:srgbClr val="FAFAFA"/>
+                          <a:srgbClr val="E2F1FE"/>
                         </a:solidFill>
                       </a:tcPr>
                     </a:tc>
@@ -12857,7 +12857,7 @@
                           <a:tailEnd type="none" w="med" len="med"/>
                         </a:lnB>
                         <a:solidFill>
-                          <a:srgbClr val="FAFAFA"/>
+                          <a:srgbClr val="E2F1FE"/>
                         </a:solidFill>
                       </a:tcPr>
                     </a:tc>
@@ -12911,7 +12911,7 @@
                           <a:tailEnd type="none" w="med" len="med"/>
                         </a:lnB>
                         <a:solidFill>
-                          <a:srgbClr val="FAFAFA"/>
+                          <a:srgbClr val="E2F1FE"/>
                         </a:solidFill>
                       </a:tcPr>
                     </a:tc>
@@ -12965,7 +12965,7 @@
                           <a:tailEnd type="none" w="med" len="med"/>
                         </a:lnB>
                         <a:solidFill>
-                          <a:srgbClr val="FAFAFA"/>
+                          <a:srgbClr val="FCEBE0"/>
                         </a:solidFill>
                       </a:tcPr>
                     </a:tc>
@@ -13019,7 +13019,7 @@
                           <a:tailEnd type="none" w="med" len="med"/>
                         </a:lnB>
                         <a:solidFill>
-                          <a:srgbClr val="FAFAFA"/>
+                          <a:srgbClr val="FCEBE0"/>
                         </a:solidFill>
                       </a:tcPr>
                     </a:tc>
@@ -13073,7 +13073,7 @@
                           <a:tailEnd type="none" w="med" len="med"/>
                         </a:lnB>
                         <a:solidFill>
-                          <a:srgbClr val="FAFAFA"/>
+                          <a:srgbClr val="F2FAF2"/>
                         </a:solidFill>
                       </a:tcPr>
                     </a:tc>
@@ -13127,7 +13127,7 @@
                           <a:tailEnd type="none" w="med" len="med"/>
                         </a:lnB>
                         <a:solidFill>
-                          <a:srgbClr val="FAFAFA"/>
+                          <a:srgbClr val="F2FAF2"/>
                         </a:solidFill>
                       </a:tcPr>
                     </a:tc>
@@ -13181,7 +13181,7 @@
                           <a:tailEnd type="none" w="med" len="med"/>
                         </a:lnB>
                         <a:solidFill>
-                          <a:srgbClr val="FAFAFA"/>
+                          <a:srgbClr val="F2FAF2"/>
                         </a:solidFill>
                       </a:tcPr>
                     </a:tc>
